--- a/week-01/presentations/ppts/day-02-working-backwards.pptx
+++ b/week-01/presentations/ppts/day-02-working-backwards.pptx
@@ -5543,25 +5543,7 @@
             </a:pPr>
             <a:r>
               <a:rPr/>
-              <a:t>Small-business HVAC dispatchers can now close their day in five minutes instead of 45, using a guided reconcile flow that pulls truck inventory, tech timecards, and parts usage into one approval screen.</a:t>
-            </a:r>
-          </a:p>
-          <a:p>
-            <a:pPr lvl="0" indent="0" marL="0">
-              <a:buNone/>
-            </a:pPr>
-            <a:r>
-              <a:rPr/>
-              <a:t>Dispatchers at 50-to-200-technician shops typically stay 45 minutes past close every night reconciling paper tickets, truck stock, and timecards. FieldPulse’s new End-of-Day Reconcile pulls these into a single guided flow, flags anomalies, and submits the day in under five minutes.</a:t>
-            </a:r>
-          </a:p>
-          <a:p>
-            <a:pPr lvl="0" indent="0" marL="0">
-              <a:buNone/>
-            </a:pPr>
-            <a:r>
-              <a:rPr/>
-              <a:t>“I used to leave after my kids were in bed. Last week I made it home for dinner four nights in a row.” — Maria R., Lead Dispatcher, Reliable Climate Co.</a:t>
+              <a:t>Small-business HVAC dispatchers can now close their day in five minutes instead of 45, using a guided reconcile flow that pulls truck inventory, tech timecards, and parts usage into one approval screen. Dispatchers at 50-to-200-technician shops typically stay 45 minutes past close every night reconciling paper tickets, truck stock, and timecards. FieldPulse’s new End-of-Day Reconcile pulls these into a single guided flow, flags anomalies, and submits the day in under five minutes. “I used to leave after my kids were in bed. Last week I made it home for dinner four nights in a row.” — Maria R., Lead Dispatcher, Reliable Climate Co.</a:t>
             </a:r>
           </a:p>
         </p:txBody>

--- a/week-01/presentations/ppts/day-02-working-backwards.pptx
+++ b/week-01/presentations/ppts/day-02-working-backwards.pptx
@@ -873,7 +873,7 @@
             </a:pPr>
             <a:r>
               <a:rPr/>
-              <a:t>The five questions are the lens we’ll bring to the next two days. If a triad nails them today, the persona and pain-point work later this week comes faster.</a:t>
+              <a:t>The five questions are the lens we’ll bring to the next two days. If a quad nails them today, the persona and pain-point work later this week comes faster.</a:t>
             </a:r>
           </a:p>
         </p:txBody>
@@ -1037,7 +1037,7 @@
             </a:pPr>
             <a:r>
               <a:rPr/>
-              <a:t>This is the checklist triads will use in Activity 4 to critique each other.</a:t>
+              <a:t>This is the checklist quads will use in Activity 4 to critique each other.</a:t>
             </a:r>
           </a:p>
         </p:txBody>
@@ -1201,7 +1201,7 @@
             </a:pPr>
             <a:r>
               <a:rPr/>
-              <a:t>This block is doubly load-bearing: it teaches the critique protocol and gives triads their first cross-triad exchange of the academy. Hold the protocol tightly.</a:t>
+              <a:t>This block is doubly load-bearing: it teaches the critique protocol and gives quads their first cross-quad exchange of the academy. Hold the protocol tightly.</a:t>
             </a:r>
           </a:p>
         </p:txBody>
@@ -1365,7 +1365,7 @@
             </a:pPr>
             <a:r>
               <a:rPr/>
-              <a:t>Don’t let triads skip the “what we left” moment in the protocol. Declining feedback thoughtfully is a PM skill.</a:t>
+              <a:t>Don’t let quads skip the “what we left” moment in the protocol. Declining feedback thoughtfully is a PM skill.</a:t>
             </a:r>
           </a:p>
         </p:txBody>
@@ -1611,7 +1611,7 @@
             </a:pPr>
             <a:r>
               <a:rPr/>
-              <a:t>Closing reflection. Encourage a one-sentence answer from each triad — the answer often points at the persona work coming tomorrow.</a:t>
+              <a:t>Closing reflection. Encourage a one-sentence answer from each quad — the answer often points at the persona work coming tomorrow.</a:t>
             </a:r>
           </a:p>
         </p:txBody>
@@ -1693,7 +1693,7 @@
             </a:pPr>
             <a:r>
               <a:rPr/>
-              <a:t>Surface the day’s arc: build the PR/FAQ, then critique it twice. The cross-triad review is the highlight; budget time accordingly.</a:t>
+              <a:t>Surface the day’s arc: build the PR/FAQ, then critique it twice. The cross-quad review is the highlight; budget time accordingly.</a:t>
             </a:r>
           </a:p>
         </p:txBody>
@@ -5780,16 +5780,16 @@
             </a:pPr>
             <a:r>
               <a:rPr b="1"/>
-              <a:t>Triads • 45 minutes</a:t>
-            </a:r>
-          </a:p>
-          <a:p>
-            <a:pPr lvl="0" indent="0" marL="0">
-              <a:buNone/>
-            </a:pPr>
-            <a:r>
-              <a:rPr/>
-              <a:t>Each triad selects one product idea (from their Day 1 critique artifacts, or a provided list). Draft three candidate heading + sub-headings. Then use AI to critique each:</a:t>
+              <a:t>Quads • 45 minutes</a:t>
+            </a:r>
+          </a:p>
+          <a:p>
+            <a:pPr lvl="0" indent="0" marL="0">
+              <a:buNone/>
+            </a:pPr>
+            <a:r>
+              <a:rPr/>
+              <a:t>Each quad selects one product idea (from their Day 1 critique artifacts, or a provided list). Draft three candidate heading + sub-headings. Then use AI to critique each:</a:t>
             </a:r>
           </a:p>
           <a:p>
@@ -6317,16 +6317,16 @@
             </a:pPr>
             <a:r>
               <a:rPr b="1"/>
-              <a:t>Triads • 45 minutes</a:t>
-            </a:r>
-          </a:p>
-          <a:p>
-            <a:pPr lvl="0" indent="0" marL="0">
-              <a:buNone/>
-            </a:pPr>
-            <a:r>
-              <a:rPr/>
-              <a:t>Your triad has a headline/sub-headline from Activity 2. Now draft a full PR paragraph + customer quote + 3 Customer-FAQ + 3 Internal-FAQ entries.</a:t>
+              <a:t>Quads • 45 minutes</a:t>
+            </a:r>
+          </a:p>
+          <a:p>
+            <a:pPr lvl="0" indent="0" marL="0">
+              <a:buNone/>
+            </a:pPr>
+            <a:r>
+              <a:rPr/>
+              <a:t>Your quad has a headline/sub-headline from Activity 2. Now draft a full PR paragraph + customer quote + 3 Customer-FAQ + 3 Internal-FAQ entries.</a:t>
             </a:r>
           </a:p>
           <a:p>
@@ -6676,7 +6676,7 @@
             </a:pPr>
             <a:r>
               <a:rPr/>
-              <a:t>👥 Activity 4 — Cross-Triad PR/FAQ Review</a:t>
+              <a:t>👥 Activity 4 — Cross-Quad PR/FAQ Review</a:t>
             </a:r>
           </a:p>
         </p:txBody>
@@ -6704,16 +6704,16 @@
             </a:pPr>
             <a:r>
               <a:rPr b="1"/>
-              <a:t>Paired triads • 60 minutes • Readouts</a:t>
-            </a:r>
-          </a:p>
-          <a:p>
-            <a:pPr lvl="0" indent="0" marL="0">
-              <a:buNone/>
-            </a:pPr>
-            <a:r>
-              <a:rPr/>
-              <a:t>Triads pair up. Using the critique protocol, each triad reviews the other’s PR/FAQ. Then 15 minutes to revise.</a:t>
+              <a:t>Paired quads • 60 minutes • Readouts</a:t>
+            </a:r>
+          </a:p>
+          <a:p>
+            <a:pPr lvl="0" indent="0" marL="0">
+              <a:buNone/>
+            </a:pPr>
+            <a:r>
+              <a:rPr/>
+              <a:t>Quads pair up. Using the critique protocol, each quad reviews the other’s PR/FAQ. Then 15 minutes to revise.</a:t>
             </a:r>
           </a:p>
           <a:p>
@@ -6740,7 +6740,7 @@
             </a:pPr>
             <a:r>
               <a:rPr/>
-              <a:t>Each triad does a 60-second readout: “What we changed and why”</a:t>
+              <a:t>Each quad does a 60-second readout: “What we changed and why”</a:t>
             </a:r>
           </a:p>
           <a:p>
@@ -6830,7 +6830,7 @@
             </a:pPr>
             <a:r>
               <a:rPr/>
-              <a:t>A complete one-page PR/FAQ per triad</a:t>
+              <a:t>A complete one-page PR/FAQ per quad</a:t>
             </a:r>
           </a:p>
           <a:p>
@@ -6959,7 +6959,7 @@
             </a:pPr>
             <a:r>
               <a:rPr b="1"/>
-              <a:t>Which of the Five Questions was hardest for your triad?</a:t>
+              <a:t>Which of the Five Questions was hardest for your quad?</a:t>
             </a:r>
           </a:p>
         </p:txBody>
@@ -7067,7 +7067,7 @@
             </a:pPr>
             <a:r>
               <a:rPr/>
-              <a:t>Run a structured peer critique of another triad’s PR/FAQ</a:t>
+              <a:t>Run a structured peer critique of another quad’s PR/FAQ</a:t>
             </a:r>
           </a:p>
         </p:txBody>
@@ -7685,16 +7685,16 @@
             </a:pPr>
             <a:r>
               <a:rPr b="1"/>
-              <a:t>Triads • 30 minutes</a:t>
-            </a:r>
-          </a:p>
-          <a:p>
-            <a:pPr lvl="0" indent="0" marL="0">
-              <a:buNone/>
-            </a:pPr>
-            <a:r>
-              <a:rPr/>
-              <a:t>Each triad receives 4 short vignettes describing how a real (anonymized) product was conceived. Decide: was this forward-built or backward-built? What’s the evidence?</a:t>
+              <a:t>Quads • 30 minutes</a:t>
+            </a:r>
+          </a:p>
+          <a:p>
+            <a:pPr lvl="0" indent="0" marL="0">
+              <a:buNone/>
+            </a:pPr>
+            <a:r>
+              <a:rPr/>
+              <a:t>Each quad receives 4 short vignettes describing how a real (anonymized) product was conceived. Decide: was this forward-built or backward-built? What’s the evidence?</a:t>
             </a:r>
           </a:p>
           <a:p>

--- a/week-01/presentations/ppts/day-02-working-backwards.pptx
+++ b/week-01/presentations/ppts/day-02-working-backwards.pptx
@@ -5780,7 +5780,7 @@
             </a:pPr>
             <a:r>
               <a:rPr b="1"/>
-              <a:t>Quads • 45 minutes</a:t>
+              <a:t>Quads • 50 minutes</a:t>
             </a:r>
           </a:p>
           <a:p>
@@ -6317,7 +6317,7 @@
             </a:pPr>
             <a:r>
               <a:rPr b="1"/>
-              <a:t>Quads • 45 minutes</a:t>
+              <a:t>Quads • 50 minutes</a:t>
             </a:r>
           </a:p>
           <a:p>
@@ -7685,7 +7685,7 @@
             </a:pPr>
             <a:r>
               <a:rPr b="1"/>
-              <a:t>Quads • 30 minutes</a:t>
+              <a:t>Quads • 45 minutes</a:t>
             </a:r>
           </a:p>
           <a:p>

--- a/week-01/presentations/ppts/day-02-working-backwards.pptx
+++ b/week-01/presentations/ppts/day-02-working-backwards.pptx
@@ -5825,7 +5825,7 @@
             </a:pPr>
             <a:r>
               <a:rPr/>
-              <a:t>⏱ 15 min draft · 15 min AI critique · 15 min pick + justify</a:t>
+              <a:t>⏱ 20 min draft · 15 min AI critique · 15 min pick + justify</a:t>
             </a:r>
           </a:p>
         </p:txBody>
@@ -6362,7 +6362,7 @@
             </a:pPr>
             <a:r>
               <a:rPr/>
-              <a:t>⏱ 10 min plan · 25 min draft · 10 min self-review</a:t>
+              <a:t>⏱ 10 min plan · 30 min draft · 10 min self-review</a:t>
             </a:r>
           </a:p>
         </p:txBody>
@@ -7721,7 +7721,7 @@
             </a:pPr>
             <a:r>
               <a:rPr/>
-              <a:t>⏱ 15 min analyze · 15 min full-room debrief</a:t>
+              <a:t>⏱ 30 min analyze · 15 min full-room debrief</a:t>
             </a:r>
           </a:p>
         </p:txBody>
